--- a/assets/TCS302/Unit-1/Lecture9_Linked_Stack_and_Expression_Conversion.pptx
+++ b/assets/TCS302/Unit-1/Lecture9_Linked_Stack_and_Expression_Conversion.pptx
@@ -4340,90 +4340,6 @@
           </a:p>
         </p:txBody>
       </p:sp>
-      <p:sp>
-        <p:nvSpPr>
-          <p:cNvPr id="41" name="Shape 39"/>
-          <p:cNvSpPr/>
-          <p:nvPr/>
-        </p:nvSpPr>
-        <p:spPr>
-          <a:xfrm>
-            <a:off x="457200" y="4160520"/>
-            <a:ext cx="8229600" cy="502920"/>
-          </a:xfrm>
-          <a:prstGeom prst="roundRect">
-            <a:avLst>
-              <a:gd name="adj" fmla="val 12727"/>
-            </a:avLst>
-          </a:prstGeom>
-          <a:solidFill>
-            <a:srgbClr val="EEF3FB"/>
-          </a:solidFill>
-          <a:ln w="12700">
-            <a:solidFill>
-              <a:srgbClr val="1E2761"/>
-            </a:solidFill>
-            <a:prstDash val="solid"/>
-          </a:ln>
-        </p:spPr>
-        <p:txBody>
-          <a:bodyPr/>
-          <a:lstStyle/>
-          <a:p>
-            <a:endParaRPr lang="en-IN"/>
-          </a:p>
-        </p:txBody>
-      </p:sp>
-      <p:sp>
-        <p:nvSpPr>
-          <p:cNvPr id="42" name="Text 40"/>
-          <p:cNvSpPr/>
-          <p:nvPr/>
-        </p:nvSpPr>
-        <p:spPr>
-          <a:xfrm>
-            <a:off x="640080" y="4160520"/>
-            <a:ext cx="7863840" cy="502920"/>
-          </a:xfrm>
-          <a:prstGeom prst="rect">
-            <a:avLst/>
-          </a:prstGeom>
-          <a:noFill/>
-          <a:ln/>
-        </p:spPr>
-        <p:txBody>
-          <a:bodyPr wrap="square" lIns="0" tIns="0" rIns="0" bIns="0" rtlCol="0" anchor="ctr"/>
-          <a:lstStyle/>
-          <a:p>
-            <a:pPr marL="0" indent="0">
-              <a:buNone/>
-            </a:pPr>
-            <a:r>
-              <a:rPr lang="en-US" sz="1200" b="1" dirty="0">
-                <a:solidFill>
-                  <a:srgbClr val="1E2761"/>
-                </a:solidFill>
-                <a:latin typeface="Calibri" pitchFamily="34" charset="0"/>
-                <a:ea typeface="Calibri" pitchFamily="34" charset="-122"/>
-                <a:cs typeface="Calibri" pitchFamily="34" charset="-120"/>
-              </a:rPr>
-              <a:t>ASK   </a:t>
-            </a:r>
-            <a:r>
-              <a:rPr lang="en-US" sz="1250" i="1" dirty="0">
-                <a:solidFill>
-                  <a:srgbClr val="2B2B2B"/>
-                </a:solidFill>
-                <a:latin typeface="Calibri" pitchFamily="34" charset="0"/>
-                <a:ea typeface="Calibri" pitchFamily="34" charset="-122"/>
-                <a:cs typeface="Calibri" pitchFamily="34" charset="-120"/>
-              </a:rPr>
-              <a:t>After the pop, which address does top hold — the freed node's, or the node storing 20?</a:t>
-            </a:r>
-            <a:endParaRPr lang="en-US" sz="1200" dirty="0"/>
-          </a:p>
-        </p:txBody>
-      </p:sp>
     </p:spTree>
   </p:cSld>
   <p:clrMapOvr>
@@ -5417,7 +5333,7 @@
         </p:nvGraphicFramePr>
         <p:xfrm>
           <a:off x="457200" y="1234440"/>
-          <a:ext cx="8229600" cy="914400"/>
+          <a:ext cx="8229600" cy="3008376"/>
         </p:xfrm>
         <a:graphic>
           <a:graphicData uri="http://schemas.openxmlformats.org/drawingml/2006/table">
@@ -7394,90 +7310,6 @@
           </a:p>
         </p:txBody>
       </p:sp>
-      <p:sp>
-        <p:nvSpPr>
-          <p:cNvPr id="13" name="Shape 11"/>
-          <p:cNvSpPr/>
-          <p:nvPr/>
-        </p:nvSpPr>
-        <p:spPr>
-          <a:xfrm>
-            <a:off x="457200" y="4160520"/>
-            <a:ext cx="8229600" cy="502920"/>
-          </a:xfrm>
-          <a:prstGeom prst="roundRect">
-            <a:avLst>
-              <a:gd name="adj" fmla="val 12727"/>
-            </a:avLst>
-          </a:prstGeom>
-          <a:solidFill>
-            <a:srgbClr val="EEF3FB"/>
-          </a:solidFill>
-          <a:ln w="12700">
-            <a:solidFill>
-              <a:srgbClr val="1E2761"/>
-            </a:solidFill>
-            <a:prstDash val="solid"/>
-          </a:ln>
-        </p:spPr>
-        <p:txBody>
-          <a:bodyPr/>
-          <a:lstStyle/>
-          <a:p>
-            <a:endParaRPr lang="en-IN"/>
-          </a:p>
-        </p:txBody>
-      </p:sp>
-      <p:sp>
-        <p:nvSpPr>
-          <p:cNvPr id="14" name="Text 12"/>
-          <p:cNvSpPr/>
-          <p:nvPr/>
-        </p:nvSpPr>
-        <p:spPr>
-          <a:xfrm>
-            <a:off x="640080" y="4160520"/>
-            <a:ext cx="7863840" cy="502920"/>
-          </a:xfrm>
-          <a:prstGeom prst="rect">
-            <a:avLst/>
-          </a:prstGeom>
-          <a:noFill/>
-          <a:ln/>
-        </p:spPr>
-        <p:txBody>
-          <a:bodyPr wrap="square" lIns="0" tIns="0" rIns="0" bIns="0" rtlCol="0" anchor="ctr"/>
-          <a:lstStyle/>
-          <a:p>
-            <a:pPr marL="0" indent="0">
-              <a:buNone/>
-            </a:pPr>
-            <a:r>
-              <a:rPr lang="en-US" sz="1200" b="1" dirty="0">
-                <a:solidFill>
-                  <a:srgbClr val="1E2761"/>
-                </a:solidFill>
-                <a:latin typeface="Calibri" pitchFamily="34" charset="0"/>
-                <a:ea typeface="Calibri" pitchFamily="34" charset="-122"/>
-                <a:cs typeface="Calibri" pitchFamily="34" charset="-120"/>
-              </a:rPr>
-              <a:t>ASK   </a:t>
-            </a:r>
-            <a:r>
-              <a:rPr lang="en-US" sz="1250" i="1" dirty="0">
-                <a:solidFill>
-                  <a:srgbClr val="2B2B2B"/>
-                </a:solidFill>
-                <a:latin typeface="Calibri" pitchFamily="34" charset="0"/>
-                <a:ea typeface="Calibri" pitchFamily="34" charset="-122"/>
-                <a:cs typeface="Calibri" pitchFamily="34" charset="-120"/>
-              </a:rPr>
-              <a:t>In A + B * C, why must * be applied before + even though + appears first?</a:t>
-            </a:r>
-            <a:endParaRPr lang="en-US" sz="1200" dirty="0"/>
-          </a:p>
-        </p:txBody>
-      </p:sp>
     </p:spTree>
   </p:cSld>
   <p:clrMapOvr>
@@ -8500,7 +8332,7 @@
         </p:nvGraphicFramePr>
         <p:xfrm>
           <a:off x="457200" y="1188720"/>
-          <a:ext cx="8229600" cy="914400"/>
+          <a:ext cx="8229600" cy="3291840"/>
         </p:xfrm>
         <a:graphic>
           <a:graphicData uri="http://schemas.openxmlformats.org/drawingml/2006/table">
@@ -11981,45 +11813,6 @@
           </a:p>
         </p:txBody>
       </p:sp>
-      <p:sp>
-        <p:nvSpPr>
-          <p:cNvPr id="7" name="Text 5"/>
-          <p:cNvSpPr/>
-          <p:nvPr/>
-        </p:nvSpPr>
-        <p:spPr>
-          <a:xfrm>
-            <a:off x="640080" y="4800600"/>
-            <a:ext cx="7863840" cy="274320"/>
-          </a:xfrm>
-          <a:prstGeom prst="rect">
-            <a:avLst/>
-          </a:prstGeom>
-          <a:noFill/>
-          <a:ln/>
-        </p:spPr>
-        <p:txBody>
-          <a:bodyPr wrap="square" lIns="0" tIns="0" rIns="0" bIns="0" rtlCol="0" anchor="ctr"/>
-          <a:lstStyle/>
-          <a:p>
-            <a:pPr marL="0" indent="0">
-              <a:buNone/>
-            </a:pPr>
-            <a:r>
-              <a:rPr lang="en-US" sz="1100" i="1" dirty="0">
-                <a:solidFill>
-                  <a:srgbClr val="CADCFC"/>
-                </a:solidFill>
-                <a:latin typeface="Calibri" pitchFamily="34" charset="0"/>
-                <a:ea typeface="Calibri" pitchFamily="34" charset="-122"/>
-                <a:cs typeface="Calibri" pitchFamily="34" charset="-120"/>
-              </a:rPr>
-              <a:t>Next lecture: evaluating postfix with a stack • recursion • Tower of Hanoi</a:t>
-            </a:r>
-            <a:endParaRPr lang="en-US" sz="1100" dirty="0"/>
-          </a:p>
-        </p:txBody>
-      </p:sp>
     </p:spTree>
   </p:cSld>
   <p:clrMapOvr>
@@ -12456,90 +12249,6 @@
           </a:p>
         </p:txBody>
       </p:sp>
-      <p:sp>
-        <p:nvSpPr>
-          <p:cNvPr id="11" name="Shape 9"/>
-          <p:cNvSpPr/>
-          <p:nvPr/>
-        </p:nvSpPr>
-        <p:spPr>
-          <a:xfrm>
-            <a:off x="457200" y="4160520"/>
-            <a:ext cx="8229600" cy="502920"/>
-          </a:xfrm>
-          <a:prstGeom prst="roundRect">
-            <a:avLst>
-              <a:gd name="adj" fmla="val 12727"/>
-            </a:avLst>
-          </a:prstGeom>
-          <a:solidFill>
-            <a:srgbClr val="EEF3FB"/>
-          </a:solidFill>
-          <a:ln w="12700">
-            <a:solidFill>
-              <a:srgbClr val="1E2761"/>
-            </a:solidFill>
-            <a:prstDash val="solid"/>
-          </a:ln>
-        </p:spPr>
-        <p:txBody>
-          <a:bodyPr/>
-          <a:lstStyle/>
-          <a:p>
-            <a:endParaRPr lang="en-IN"/>
-          </a:p>
-        </p:txBody>
-      </p:sp>
-      <p:sp>
-        <p:nvSpPr>
-          <p:cNvPr id="12" name="Text 10"/>
-          <p:cNvSpPr/>
-          <p:nvPr/>
-        </p:nvSpPr>
-        <p:spPr>
-          <a:xfrm>
-            <a:off x="640080" y="4160520"/>
-            <a:ext cx="7863840" cy="502920"/>
-          </a:xfrm>
-          <a:prstGeom prst="rect">
-            <a:avLst/>
-          </a:prstGeom>
-          <a:noFill/>
-          <a:ln/>
-        </p:spPr>
-        <p:txBody>
-          <a:bodyPr wrap="square" lIns="0" tIns="0" rIns="0" bIns="0" rtlCol="0" anchor="ctr"/>
-          <a:lstStyle/>
-          <a:p>
-            <a:pPr marL="0" indent="0">
-              <a:buNone/>
-            </a:pPr>
-            <a:r>
-              <a:rPr lang="en-US" sz="1200" b="1" dirty="0">
-                <a:solidFill>
-                  <a:srgbClr val="1E2761"/>
-                </a:solidFill>
-                <a:latin typeface="Calibri" pitchFamily="34" charset="0"/>
-                <a:ea typeface="Calibri" pitchFamily="34" charset="-122"/>
-                <a:cs typeface="Calibri" pitchFamily="34" charset="-120"/>
-              </a:rPr>
-              <a:t>ASK   </a:t>
-            </a:r>
-            <a:r>
-              <a:rPr lang="en-US" sz="1250" i="1" dirty="0">
-                <a:solidFill>
-                  <a:srgbClr val="2B2B2B"/>
-                </a:solidFill>
-                <a:latin typeface="Calibri" pitchFamily="34" charset="0"/>
-                <a:ea typeface="Calibri" pitchFamily="34" charset="-122"/>
-                <a:cs typeface="Calibri" pitchFamily="34" charset="-120"/>
-              </a:rPr>
-              <a:t>Which Lecture 8 function disappears in the linked version, and what replaces its job?</a:t>
-            </a:r>
-            <a:endParaRPr lang="en-US" sz="1200" dirty="0"/>
-          </a:p>
-        </p:txBody>
-      </p:sp>
     </p:spTree>
   </p:cSld>
   <p:clrMapOvr>
@@ -14318,90 +14027,6 @@
           </a:p>
         </p:txBody>
       </p:sp>
-      <p:sp>
-        <p:nvSpPr>
-          <p:cNvPr id="13" name="Shape 11"/>
-          <p:cNvSpPr/>
-          <p:nvPr/>
-        </p:nvSpPr>
-        <p:spPr>
-          <a:xfrm>
-            <a:off x="4754880" y="4160520"/>
-            <a:ext cx="3931920" cy="822960"/>
-          </a:xfrm>
-          <a:prstGeom prst="roundRect">
-            <a:avLst>
-              <a:gd name="adj" fmla="val 7778"/>
-            </a:avLst>
-          </a:prstGeom>
-          <a:solidFill>
-            <a:srgbClr val="EEF3FB"/>
-          </a:solidFill>
-          <a:ln w="12700">
-            <a:solidFill>
-              <a:srgbClr val="1E2761"/>
-            </a:solidFill>
-            <a:prstDash val="solid"/>
-          </a:ln>
-        </p:spPr>
-        <p:txBody>
-          <a:bodyPr/>
-          <a:lstStyle/>
-          <a:p>
-            <a:endParaRPr lang="en-IN"/>
-          </a:p>
-        </p:txBody>
-      </p:sp>
-      <p:sp>
-        <p:nvSpPr>
-          <p:cNvPr id="14" name="Text 12"/>
-          <p:cNvSpPr/>
-          <p:nvPr/>
-        </p:nvSpPr>
-        <p:spPr>
-          <a:xfrm>
-            <a:off x="4937760" y="4160520"/>
-            <a:ext cx="3566160" cy="822960"/>
-          </a:xfrm>
-          <a:prstGeom prst="rect">
-            <a:avLst/>
-          </a:prstGeom>
-          <a:noFill/>
-          <a:ln/>
-        </p:spPr>
-        <p:txBody>
-          <a:bodyPr wrap="square" lIns="0" tIns="0" rIns="0" bIns="0" rtlCol="0" anchor="ctr"/>
-          <a:lstStyle/>
-          <a:p>
-            <a:pPr marL="0" indent="0">
-              <a:buNone/>
-            </a:pPr>
-            <a:r>
-              <a:rPr lang="en-US" sz="1200" b="1" dirty="0">
-                <a:solidFill>
-                  <a:srgbClr val="1E2761"/>
-                </a:solidFill>
-                <a:latin typeface="Calibri" pitchFamily="34" charset="0"/>
-                <a:ea typeface="Calibri" pitchFamily="34" charset="-122"/>
-                <a:cs typeface="Calibri" pitchFamily="34" charset="-120"/>
-              </a:rPr>
-              <a:t>ASK   </a:t>
-            </a:r>
-            <a:r>
-              <a:rPr lang="en-US" sz="1250" i="1" dirty="0">
-                <a:solidFill>
-                  <a:srgbClr val="2B2B2B"/>
-                </a:solidFill>
-                <a:latin typeface="Calibri" pitchFamily="34" charset="0"/>
-                <a:ea typeface="Calibri" pitchFamily="34" charset="-122"/>
-                <a:cs typeface="Calibri" pitchFamily="34" charset="-120"/>
-              </a:rPr>
-              <a:t>Without the size field, what would stackSize have to do, and what would it cost?</a:t>
-            </a:r>
-            <a:endParaRPr lang="en-US" sz="1200" dirty="0"/>
-          </a:p>
-        </p:txBody>
-      </p:sp>
     </p:spTree>
   </p:cSld>
   <p:clrMapOvr>
@@ -15720,90 +15345,6 @@
               <a:t>The outValue NULL guard matches the Lecture 8 reference file.</a:t>
             </a:r>
             <a:endParaRPr lang="en-US" sz="1250" dirty="0"/>
-          </a:p>
-        </p:txBody>
-      </p:sp>
-      <p:sp>
-        <p:nvSpPr>
-          <p:cNvPr id="9" name="Shape 7"/>
-          <p:cNvSpPr/>
-          <p:nvPr/>
-        </p:nvSpPr>
-        <p:spPr>
-          <a:xfrm>
-            <a:off x="5623560" y="3977640"/>
-            <a:ext cx="3063240" cy="685800"/>
-          </a:xfrm>
-          <a:prstGeom prst="roundRect">
-            <a:avLst>
-              <a:gd name="adj" fmla="val 9333"/>
-            </a:avLst>
-          </a:prstGeom>
-          <a:solidFill>
-            <a:srgbClr val="EEF3FB"/>
-          </a:solidFill>
-          <a:ln w="12700">
-            <a:solidFill>
-              <a:srgbClr val="1E2761"/>
-            </a:solidFill>
-            <a:prstDash val="solid"/>
-          </a:ln>
-        </p:spPr>
-        <p:txBody>
-          <a:bodyPr/>
-          <a:lstStyle/>
-          <a:p>
-            <a:endParaRPr lang="en-IN"/>
-          </a:p>
-        </p:txBody>
-      </p:sp>
-      <p:sp>
-        <p:nvSpPr>
-          <p:cNvPr id="10" name="Text 8"/>
-          <p:cNvSpPr/>
-          <p:nvPr/>
-        </p:nvSpPr>
-        <p:spPr>
-          <a:xfrm>
-            <a:off x="5806440" y="3977640"/>
-            <a:ext cx="2697480" cy="685800"/>
-          </a:xfrm>
-          <a:prstGeom prst="rect">
-            <a:avLst/>
-          </a:prstGeom>
-          <a:noFill/>
-          <a:ln/>
-        </p:spPr>
-        <p:txBody>
-          <a:bodyPr wrap="square" lIns="0" tIns="0" rIns="0" bIns="0" rtlCol="0" anchor="ctr"/>
-          <a:lstStyle/>
-          <a:p>
-            <a:pPr marL="0" indent="0">
-              <a:buNone/>
-            </a:pPr>
-            <a:r>
-              <a:rPr lang="en-US" sz="1200" b="1" dirty="0">
-                <a:solidFill>
-                  <a:srgbClr val="1E2761"/>
-                </a:solidFill>
-                <a:latin typeface="Calibri" pitchFamily="34" charset="0"/>
-                <a:ea typeface="Calibri" pitchFamily="34" charset="-122"/>
-                <a:cs typeface="Calibri" pitchFamily="34" charset="-120"/>
-              </a:rPr>
-              <a:t>ASK   </a:t>
-            </a:r>
-            <a:r>
-              <a:rPr lang="en-US" sz="1250" i="1" dirty="0">
-                <a:solidFill>
-                  <a:srgbClr val="2B2B2B"/>
-                </a:solidFill>
-                <a:latin typeface="Calibri" pitchFamily="34" charset="0"/>
-                <a:ea typeface="Calibri" pitchFamily="34" charset="-122"/>
-                <a:cs typeface="Calibri" pitchFamily="34" charset="-120"/>
-              </a:rPr>
-              <a:t>What exactly is lost if free(node) is omitted — and when would you notice?</a:t>
-            </a:r>
-            <a:endParaRPr lang="en-US" sz="1200" dirty="0"/>
           </a:p>
         </p:txBody>
       </p:sp>
